--- a/docs/slides/pptx/M1_업무효율화의이해.pptx
+++ b/docs/slides/pptx/M1_업무효율화의이해.pptx
@@ -3148,7 +3148,7 @@
           </a:fontRef>
         </p:style>
         <p:txBody>
-          <a:bodyPr rtlCol="0" anchor="ctr"/>
+          <a:bodyPr rtlCol="0" anchor="t" wrap="square"/>
           <a:lstStyle/>
           <a:p>
             <a:pPr algn="ctr"/>
@@ -3192,7 +3192,7 @@
           </a:fontRef>
         </p:style>
         <p:txBody>
-          <a:bodyPr rtlCol="0" anchor="ctr"/>
+          <a:bodyPr rtlCol="0" anchor="t" wrap="square"/>
           <a:lstStyle/>
           <a:p>
             <a:pPr algn="ctr"/>
@@ -3236,7 +3236,7 @@
           </a:fontRef>
         </p:style>
         <p:txBody>
-          <a:bodyPr rtlCol="0" anchor="ctr"/>
+          <a:bodyPr rtlCol="0" anchor="t" wrap="square"/>
           <a:lstStyle/>
           <a:p>
             <a:pPr algn="ctr"/>
@@ -3280,7 +3280,7 @@
           </a:fontRef>
         </p:style>
         <p:txBody>
-          <a:bodyPr rtlCol="0" anchor="ctr"/>
+          <a:bodyPr rtlCol="0" anchor="t" wrap="square"/>
           <a:lstStyle/>
           <a:p>
             <a:pPr algn="ctr"/>
@@ -3324,7 +3324,7 @@
           </a:fontRef>
         </p:style>
         <p:txBody>
-          <a:bodyPr rtlCol="0" anchor="ctr"/>
+          <a:bodyPr rtlCol="0" anchor="t" wrap="square"/>
           <a:lstStyle/>
           <a:p>
             <a:pPr algn="ctr"/>
@@ -3368,7 +3368,7 @@
           </a:fontRef>
         </p:style>
         <p:txBody>
-          <a:bodyPr rtlCol="0" anchor="ctr"/>
+          <a:bodyPr rtlCol="0" anchor="t" wrap="square"/>
           <a:lstStyle/>
           <a:p>
             <a:pPr algn="ctr"/>
@@ -3412,7 +3412,7 @@
           </a:fontRef>
         </p:style>
         <p:txBody>
-          <a:bodyPr rtlCol="0" anchor="ctr"/>
+          <a:bodyPr rtlCol="0" anchor="t" wrap="square"/>
           <a:lstStyle/>
           <a:p>
             <a:pPr algn="ctr"/>
@@ -3624,7 +3624,7 @@
           </a:fontRef>
         </p:style>
         <p:txBody>
-          <a:bodyPr rtlCol="0" anchor="ctr"/>
+          <a:bodyPr rtlCol="0" anchor="t" wrap="square"/>
           <a:lstStyle/>
           <a:p>
             <a:pPr algn="ctr"/>
@@ -3880,7 +3880,7 @@
           </a:fontRef>
         </p:style>
         <p:txBody>
-          <a:bodyPr rtlCol="0" anchor="ctr"/>
+          <a:bodyPr rtlCol="0" anchor="t" wrap="square"/>
           <a:lstStyle/>
           <a:p>
             <a:pPr algn="ctr"/>
@@ -4149,7 +4149,7 @@
           </a:fontRef>
         </p:style>
         <p:txBody>
-          <a:bodyPr rtlCol="0" anchor="ctr"/>
+          <a:bodyPr rtlCol="0" anchor="t" wrap="square"/>
           <a:lstStyle/>
           <a:p>
             <a:pPr algn="ctr"/>
@@ -4264,10 +4264,10 @@
           </a:fontRef>
         </p:style>
         <p:txBody>
-          <a:bodyPr rtlCol="0" anchor="ctr" wrap="square" lIns="411480" rIns="365760" tIns="502920" bIns="320040"/>
-          <a:lstStyle/>
-          <a:p>
-            <a:pPr algn="ctr">
+          <a:bodyPr rtlCol="0" anchor="t" wrap="square" lIns="411480" rIns="365760" tIns="502920" bIns="320040"/>
+          <a:lstStyle/>
+          <a:p>
+            <a:pPr algn="l">
               <a:lnSpc>
                 <a:spcPct val="115000"/>
               </a:lnSpc>
@@ -4291,7 +4291,7 @@
             </a:r>
           </a:p>
           <a:p>
-            <a:pPr>
+            <a:pPr algn="l">
               <a:lnSpc>
                 <a:spcPct val="115000"/>
               </a:lnSpc>
@@ -4315,7 +4315,7 @@
             </a:r>
           </a:p>
           <a:p>
-            <a:pPr>
+            <a:pPr algn="l">
               <a:lnSpc>
                 <a:spcPct val="115000"/>
               </a:lnSpc>
@@ -4339,7 +4339,7 @@
             </a:r>
           </a:p>
           <a:p>
-            <a:pPr>
+            <a:pPr algn="l">
               <a:lnSpc>
                 <a:spcPct val="115000"/>
               </a:lnSpc>
@@ -4401,7 +4401,7 @@
           </a:fontRef>
         </p:style>
         <p:txBody>
-          <a:bodyPr rtlCol="0" anchor="ctr"/>
+          <a:bodyPr rtlCol="0" anchor="t" wrap="square"/>
           <a:lstStyle/>
           <a:p>
             <a:pPr algn="ctr"/>
@@ -4471,7 +4471,7 @@
           </a:fontRef>
         </p:style>
         <p:txBody>
-          <a:bodyPr rtlCol="0" anchor="ctr"/>
+          <a:bodyPr rtlCol="0" anchor="t" wrap="square"/>
           <a:lstStyle/>
           <a:p>
             <a:pPr algn="ctr"/>
@@ -4586,7 +4586,7 @@
           </a:fontRef>
         </p:style>
         <p:txBody>
-          <a:bodyPr rtlCol="0" anchor="ctr" wrap="square" lIns="365760" rIns="365760" tIns="228600" bIns="182880"/>
+          <a:bodyPr rtlCol="0" anchor="t" wrap="square" lIns="365760" rIns="365760" tIns="228600" bIns="182880"/>
           <a:lstStyle/>
           <a:p>
             <a:pPr algn="l">
@@ -4686,7 +4686,7 @@
           </a:fontRef>
         </p:style>
         <p:txBody>
-          <a:bodyPr rtlCol="0" anchor="ctr" wrap="square" lIns="365760" rIns="365760" tIns="201168" bIns="182880"/>
+          <a:bodyPr rtlCol="0" anchor="t" wrap="square" lIns="365760" rIns="365760" tIns="201168" bIns="182880"/>
           <a:lstStyle/>
           <a:p>
             <a:pPr algn="l">
@@ -4788,7 +4788,7 @@
           </a:fontRef>
         </p:style>
         <p:txBody>
-          <a:bodyPr rtlCol="0" anchor="ctr"/>
+          <a:bodyPr rtlCol="0" anchor="t" wrap="square"/>
           <a:lstStyle/>
           <a:p>
             <a:pPr algn="ctr"/>
@@ -5044,7 +5044,7 @@
           </a:fontRef>
         </p:style>
         <p:txBody>
-          <a:bodyPr rtlCol="0" anchor="ctr"/>
+          <a:bodyPr rtlCol="0" anchor="t" wrap="square"/>
           <a:lstStyle/>
           <a:p>
             <a:pPr algn="ctr"/>
@@ -5313,7 +5313,7 @@
           </a:fontRef>
         </p:style>
         <p:txBody>
-          <a:bodyPr rtlCol="0" anchor="ctr"/>
+          <a:bodyPr rtlCol="0" anchor="t" wrap="square"/>
           <a:lstStyle/>
           <a:p>
             <a:pPr algn="ctr"/>
@@ -5513,7 +5513,7 @@
           </a:fontRef>
         </p:style>
         <p:txBody>
-          <a:bodyPr rtlCol="0" anchor="ctr"/>
+          <a:bodyPr rtlCol="0" anchor="t" wrap="square"/>
           <a:lstStyle/>
           <a:p>
             <a:pPr algn="ctr"/>
@@ -5782,7 +5782,7 @@
           </a:fontRef>
         </p:style>
         <p:txBody>
-          <a:bodyPr rtlCol="0" anchor="ctr"/>
+          <a:bodyPr rtlCol="0" anchor="t" wrap="square"/>
           <a:lstStyle/>
           <a:p>
             <a:pPr algn="ctr"/>
@@ -6016,7 +6016,7 @@
           </a:fontRef>
         </p:style>
         <p:txBody>
-          <a:bodyPr rtlCol="0" anchor="ctr"/>
+          <a:bodyPr rtlCol="0" anchor="t" wrap="square"/>
           <a:lstStyle/>
           <a:p>
             <a:pPr algn="ctr"/>
@@ -6181,7 +6181,7 @@
           </a:fontRef>
         </p:style>
         <p:txBody>
-          <a:bodyPr rtlCol="0" anchor="ctr"/>
+          <a:bodyPr rtlCol="0" anchor="t" wrap="square"/>
           <a:lstStyle/>
           <a:p>
             <a:pPr algn="ctr"/>
@@ -6483,7 +6483,7 @@
           </a:fontRef>
         </p:style>
         <p:txBody>
-          <a:bodyPr rtlCol="0" anchor="ctr"/>
+          <a:bodyPr rtlCol="0" anchor="t" wrap="square"/>
           <a:lstStyle/>
           <a:p>
             <a:pPr algn="ctr"/>
@@ -6787,7 +6787,7 @@
           </a:fontRef>
         </p:style>
         <p:txBody>
-          <a:bodyPr rtlCol="0" anchor="ctr"/>
+          <a:bodyPr rtlCol="0" anchor="t" wrap="square"/>
           <a:lstStyle/>
           <a:p>
             <a:pPr algn="ctr"/>
@@ -6902,10 +6902,10 @@
           </a:fontRef>
         </p:style>
         <p:txBody>
-          <a:bodyPr rtlCol="0" anchor="ctr" wrap="square" lIns="411480" rIns="365760" tIns="502920" bIns="320040"/>
-          <a:lstStyle/>
-          <a:p>
-            <a:pPr algn="ctr">
+          <a:bodyPr rtlCol="0" anchor="t" wrap="square" lIns="411480" rIns="365760" tIns="502920" bIns="320040"/>
+          <a:lstStyle/>
+          <a:p>
+            <a:pPr algn="l">
               <a:lnSpc>
                 <a:spcPct val="115000"/>
               </a:lnSpc>
@@ -6929,7 +6929,7 @@
             </a:r>
           </a:p>
           <a:p>
-            <a:pPr>
+            <a:pPr algn="l">
               <a:lnSpc>
                 <a:spcPct val="115000"/>
               </a:lnSpc>
@@ -6953,7 +6953,7 @@
             </a:r>
           </a:p>
           <a:p>
-            <a:pPr>
+            <a:pPr algn="l">
               <a:lnSpc>
                 <a:spcPct val="115000"/>
               </a:lnSpc>
@@ -6977,7 +6977,7 @@
             </a:r>
           </a:p>
           <a:p>
-            <a:pPr>
+            <a:pPr algn="l">
               <a:lnSpc>
                 <a:spcPct val="115000"/>
               </a:lnSpc>
@@ -7001,7 +7001,7 @@
             </a:r>
           </a:p>
           <a:p>
-            <a:pPr>
+            <a:pPr algn="l">
               <a:lnSpc>
                 <a:spcPct val="115000"/>
               </a:lnSpc>
@@ -7025,7 +7025,7 @@
             </a:r>
           </a:p>
           <a:p>
-            <a:pPr>
+            <a:pPr algn="l">
               <a:lnSpc>
                 <a:spcPct val="115000"/>
               </a:lnSpc>
@@ -7049,7 +7049,7 @@
             </a:r>
           </a:p>
           <a:p>
-            <a:pPr>
+            <a:pPr algn="l">
               <a:lnSpc>
                 <a:spcPct val="115000"/>
               </a:lnSpc>
@@ -7073,7 +7073,7 @@
             </a:r>
           </a:p>
           <a:p>
-            <a:pPr>
+            <a:pPr algn="l">
               <a:lnSpc>
                 <a:spcPct val="115000"/>
               </a:lnSpc>
@@ -7135,7 +7135,7 @@
           </a:fontRef>
         </p:style>
         <p:txBody>
-          <a:bodyPr rtlCol="0" anchor="ctr"/>
+          <a:bodyPr rtlCol="0" anchor="t" wrap="square"/>
           <a:lstStyle/>
           <a:p>
             <a:pPr algn="ctr"/>
@@ -7205,7 +7205,7 @@
           </a:fontRef>
         </p:style>
         <p:txBody>
-          <a:bodyPr rtlCol="0" anchor="ctr"/>
+          <a:bodyPr rtlCol="0" anchor="t" wrap="square"/>
           <a:lstStyle/>
           <a:p>
             <a:pPr algn="ctr"/>
@@ -7320,7 +7320,7 @@
           </a:fontRef>
         </p:style>
         <p:txBody>
-          <a:bodyPr rtlCol="0" anchor="ctr" wrap="square" lIns="365760" rIns="365760" tIns="228600" bIns="182880"/>
+          <a:bodyPr rtlCol="0" anchor="t" wrap="square" lIns="365760" rIns="365760" tIns="228600" bIns="182880"/>
           <a:lstStyle/>
           <a:p>
             <a:pPr algn="l">
@@ -7455,7 +7455,7 @@
           </a:fontRef>
         </p:style>
         <p:txBody>
-          <a:bodyPr rtlCol="0" anchor="ctr" wrap="square" lIns="365760" rIns="365760" tIns="201168" bIns="182880"/>
+          <a:bodyPr rtlCol="0" anchor="t" wrap="square" lIns="365760" rIns="365760" tIns="201168" bIns="182880"/>
           <a:lstStyle/>
           <a:p>
             <a:pPr algn="l">
@@ -7557,7 +7557,7 @@
           </a:fontRef>
         </p:style>
         <p:txBody>
-          <a:bodyPr rtlCol="0" anchor="ctr"/>
+          <a:bodyPr rtlCol="0" anchor="t" wrap="square"/>
           <a:lstStyle/>
           <a:p>
             <a:pPr algn="ctr"/>
